--- a/syllabus/cen429-izlence-sunum.pptx
+++ b/syllabus/cen429-izlence-sunum.pptx
@@ -4339,7 +4339,7 @@
                   <a:srgbClr val="1F2D3A"/>
                 </a:solidFill>
               </a:rPr>
-              <a:t>: veri güvenliği ve kriptografi, C/C++ ve Java sağlamlaştırma,</a:t>
+              <a:t>: veri güvenliği ve kriptografi, C/C++ ve Java sağlamlaştırma (hardening),</a:t>
             </a:r>
           </a:p>
         </p:txBody>
